--- a/presentation/Copilot_Presentation.pptx
+++ b/presentation/Copilot_Presentation.pptx
@@ -38895,7 +38895,7 @@
                 </a:solidFill>
                 <a:latin typeface="Segoe UI"/>
               </a:rPr>
-              <a:t>AGENTS.md, copilot-instructions, instructions/, skills (day, atlassian, evidence, kg, kg-refresh…), hook, read-only agent, .mcp.json, copilot-setup-steps — ready to copy</a:t>
+              <a:t>AGENTS.md, copilot-instructions, instructions/, skills (day, atlassian, evidence, preview, kg…), hook, read-only agent, .mcp.json, copilot-setup-steps — ready to copy</a:t>
             </a:r>
           </a:p>
         </p:txBody>
